--- a/output/스마트공장XAI_포트폴리오.pptx
+++ b/output/스마트공장XAI_포트폴리오.pptx
@@ -11313,7 +11313,7 @@
       </p:sp>
       <p:pic>
         <p:nvPicPr>
-          <p:cNvPr id="7" name="Picture 6" descr="03_tab1_danger_top.png"/>
+          <p:cNvPr id="7" name="Picture 6" descr="03_tab1_danger_nlg.png"/>
           <p:cNvPicPr>
             <a:picLocks noChangeAspect="1"/>
           </p:cNvPicPr>
@@ -11891,7 +11891,7 @@
       </p:sp>
       <p:pic>
         <p:nvPicPr>
-          <p:cNvPr id="7" name="Picture 6" descr="05_tab1_live_stream.png"/>
+          <p:cNvPr id="7" name="Picture 6" descr="05_tab1_live_nlg.png"/>
           <p:cNvPicPr>
             <a:picLocks noChangeAspect="1"/>
           </p:cNvPicPr>
